--- a/docs/EFT/Aulafy_EFT_Grupo8.pptx
+++ b/docs/EFT/Aulafy_EFT_Grupo8.pptx
@@ -1032,7 +1032,7 @@
           <a:p>
             <a:r>
               <a:rPr lang="en-US" dirty="0"/>
-              <a:t>Tiempo sugerido: 1:30. Presenta Sebastián.
+              <a:t>Tiempo sugerido: 1:30. Presenta Katherine.
 Mostrar el dashboard como evidencia de que los módulos están integrados, no aislados.
 Explicar que el sistema funciona como una aplicación de una sola página en Angular y consume una API REST.
 Conectar con la siguiente diapositiva: cómo se sostiene técnicamente esta solución.</a:t>
